--- a/dist/초3/영어/듣기와말하기/초3_영어_듣기와말하기_01_인사하기_학생용.pptx
+++ b/dist/초3/영어/듣기와말하기/초3_영어_듣기와말하기_01_인사하기_학생용.pptx
@@ -120,13 +120,13 @@
   <p:extLst>
     <p:ext uri="{521415D9-36F7-43E2-AB2F-B90AF26B5E84}">
       <p14:sectionLst xmlns:p14="http://schemas.microsoft.com/office/powerpoint/2010/main">
-        <p14:section name="도입" id="{17af63dc-daee-b224-971c-26ed80940144}">
+        <p14:section name="도입" id="{8e76a980-cdf7-130b-72d6-846cb631075f}">
           <p14:sldIdLst>
             <p14:sldId id="256"/>
             <p14:sldId id="257"/>
           </p14:sldIdLst>
         </p14:section>
-        <p14:section name="개념" id="{ef8134da-b1a8-2b0c-d994-452d1535ff7e}">
+        <p14:section name="개념" id="{d91a1b10-5975-de82-399e-3c949b9e71de}">
           <p14:sldIdLst>
             <p14:sldId id="258"/>
             <p14:sldId id="259"/>
@@ -134,7 +134,7 @@
             <p14:sldId id="263"/>
           </p14:sldIdLst>
         </p14:section>
-        <p14:section name="연습" id="{e8383baf-47ba-146f-9b44-89cb156bcc8e}">
+        <p14:section name="연습" id="{3e4b3321-0be6-50b6-74d0-9bc0daaea51e}">
           <p14:sldIdLst>
             <p14:sldId id="260"/>
             <p14:sldId id="261"/>
@@ -142,24 +142,24 @@
             <p14:sldId id="265"/>
           </p14:sldIdLst>
         </p14:section>
-        <p14:section name="개념" id="{6d5d5d03-a966-87b6-7150-bd2b85209834}">
+        <p14:section name="개념" id="{0e8e5f43-28ed-f61b-9185-b895a472e200}">
           <p14:sldIdLst/>
         </p14:section>
-        <p14:section name="연습" id="{1e4b5727-0523-f49d-594e-1d7d8f63a8e6}">
+        <p14:section name="연습" id="{325fd940-06d5-91aa-3797-23ced98bef20}">
           <p14:sldIdLst/>
         </p14:section>
-        <p14:section name="확인" id="{9cb460f1-55c8-ae75-25a3-7ffd9f63d082}">
+        <p14:section name="확인" id="{a7601b40-f289-871d-b07b-d8474c94b417}">
           <p14:sldIdLst>
             <p14:sldId id="266"/>
             <p14:sldId id="267"/>
           </p14:sldIdLst>
         </p14:section>
-        <p14:section name="정리" id="{743fa897-8d71-d2c5-c78a-af92c36a33e8}">
+        <p14:section name="정리" id="{3b865c84-aa9e-330d-d650-75a59a2fe9c0}">
           <p14:sldIdLst>
             <p14:sldId id="268"/>
           </p14:sldIdLst>
         </p14:section>
-        <p14:section name="보충" id="{bbeb791f-4d42-3ae8-8aa6-a7027392fccf}">
+        <p14:section name="보충" id="{c0dd9932-f04c-54c2-d792-32253811f6bb}">
           <p14:sldIdLst>
             <p14:sldId id="269"/>
           </p14:sldIdLst>
@@ -2900,7 +2900,7 @@
               <a:buNone/>
             </a:pPr>
             <a:r>
-              <a:rPr lang="ko-KR" altLang="en-US" sz="3400" b="1" dirty="0">
+              <a:rPr lang="en-US" altLang="ko-KR" sz="3400" b="1" dirty="0">
                 <a:solidFill>
                   <a:srgbClr val="1F2937"/>
                 </a:solidFill>
@@ -2947,7 +2947,7 @@
               <a:buNone/>
             </a:pPr>
             <a:r>
-              <a:rPr lang="ko-KR" altLang="en-US" sz="3400" b="1" dirty="0">
+              <a:rPr lang="en-US" altLang="ko-KR" sz="3400" b="1" dirty="0">
                 <a:solidFill>
                   <a:srgbClr val="1F2937"/>
                 </a:solidFill>
@@ -3316,7 +3316,7 @@
               <a:buNone/>
             </a:pPr>
             <a:r>
-              <a:rPr lang="ko-KR" altLang="en-US" sz="3000" dirty="0">
+              <a:rPr lang="en-US" altLang="ko-KR" sz="3000" dirty="0">
                 <a:solidFill>
                   <a:srgbClr val="1F2937"/>
                 </a:solidFill>
@@ -3333,7 +3333,7 @@
               <a:buNone/>
             </a:pPr>
             <a:r>
-              <a:rPr lang="ko-KR" altLang="en-US" sz="3000" dirty="0">
+              <a:rPr lang="en-US" altLang="ko-KR" sz="3000" dirty="0">
                 <a:solidFill>
                   <a:srgbClr val="1F2937"/>
                 </a:solidFill>
@@ -3419,7 +3419,7 @@
               <a:buNone/>
             </a:pPr>
             <a:r>
-              <a:rPr lang="ko-KR" altLang="en-US" sz="3000" dirty="0">
+              <a:rPr lang="en-US" altLang="ko-KR" sz="3000" dirty="0">
                 <a:solidFill>
                   <a:srgbClr val="1F2937"/>
                 </a:solidFill>
@@ -3436,7 +3436,7 @@
               <a:buNone/>
             </a:pPr>
             <a:r>
-              <a:rPr lang="ko-KR" altLang="en-US" sz="3000" dirty="0">
+              <a:rPr lang="en-US" altLang="ko-KR" sz="3000" dirty="0">
                 <a:solidFill>
                   <a:srgbClr val="1F2937"/>
                 </a:solidFill>
@@ -3522,7 +3522,7 @@
               <a:buNone/>
             </a:pPr>
             <a:r>
-              <a:rPr lang="ko-KR" altLang="en-US" sz="3000" dirty="0">
+              <a:rPr lang="en-US" altLang="ko-KR" sz="3000" dirty="0">
                 <a:solidFill>
                   <a:srgbClr val="1F2937"/>
                 </a:solidFill>
@@ -3539,7 +3539,7 @@
               <a:buNone/>
             </a:pPr>
             <a:r>
-              <a:rPr lang="ko-KR" altLang="en-US" sz="3000" dirty="0">
+              <a:rPr lang="en-US" altLang="ko-KR" sz="3000" dirty="0">
                 <a:solidFill>
                   <a:srgbClr val="1F2937"/>
                 </a:solidFill>
@@ -4249,7 +4249,7 @@
               <a:buNone/>
             </a:pPr>
             <a:r>
-              <a:rPr lang="ko-KR" altLang="en-US" sz="3000" dirty="0">
+              <a:rPr lang="en-US" altLang="ko-KR" sz="3000" dirty="0">
                 <a:solidFill>
                   <a:srgbClr val="1F2937"/>
                 </a:solidFill>
@@ -4365,7 +4365,7 @@
               <a:buNone/>
             </a:pPr>
             <a:r>
-              <a:rPr lang="ko-KR" altLang="en-US" sz="3000" dirty="0">
+              <a:rPr lang="en-US" altLang="ko-KR" sz="3000" dirty="0">
                 <a:solidFill>
                   <a:srgbClr val="1F2937"/>
                 </a:solidFill>
@@ -4481,7 +4481,7 @@
               <a:buNone/>
             </a:pPr>
             <a:r>
-              <a:rPr lang="ko-KR" altLang="en-US" sz="3000" dirty="0">
+              <a:rPr lang="en-US" altLang="ko-KR" sz="3000" dirty="0">
                 <a:solidFill>
                   <a:srgbClr val="1F2937"/>
                 </a:solidFill>
@@ -5889,7 +5889,7 @@
               <a:buNone/>
             </a:pPr>
             <a:r>
-              <a:rPr lang="ko-KR" altLang="en-US" sz="3400" b="1" dirty="0">
+              <a:rPr lang="en-US" altLang="ko-KR" sz="3400" b="1" dirty="0">
                 <a:solidFill>
                   <a:srgbClr val="1F2937"/>
                 </a:solidFill>
@@ -5953,7 +5953,7 @@
               <a:buNone/>
             </a:pPr>
             <a:r>
-              <a:rPr lang="ko-KR" altLang="en-US" sz="3400" b="1" dirty="0">
+              <a:rPr lang="en-US" altLang="ko-KR" sz="3400" b="1" dirty="0">
                 <a:solidFill>
                   <a:srgbClr val="1F2937"/>
                 </a:solidFill>
@@ -6200,7 +6200,7 @@
               <a:buNone/>
             </a:pPr>
             <a:r>
-              <a:rPr lang="ko-KR" altLang="en-US" sz="3400" b="1" dirty="0">
+              <a:rPr lang="en-US" altLang="ko-KR" sz="3400" b="1" dirty="0">
                 <a:solidFill>
                   <a:srgbClr val="1F2937"/>
                 </a:solidFill>
@@ -6264,7 +6264,7 @@
               <a:buNone/>
             </a:pPr>
             <a:r>
-              <a:rPr lang="ko-KR" altLang="en-US" sz="3400" b="1" dirty="0">
+              <a:rPr lang="en-US" altLang="ko-KR" sz="3400" b="1" dirty="0">
                 <a:solidFill>
                   <a:srgbClr val="1F2937"/>
                 </a:solidFill>
@@ -7107,7 +7107,7 @@
               <a:buNone/>
             </a:pPr>
             <a:r>
-              <a:rPr lang="ko-KR" altLang="en-US" sz="3400" b="1" dirty="0">
+              <a:rPr lang="en-US" altLang="ko-KR" sz="3400" b="1" dirty="0">
                 <a:solidFill>
                   <a:srgbClr val="1F2937"/>
                 </a:solidFill>
@@ -7154,7 +7154,7 @@
               <a:buNone/>
             </a:pPr>
             <a:r>
-              <a:rPr lang="ko-KR" altLang="en-US" sz="3400" b="1" dirty="0">
+              <a:rPr lang="en-US" altLang="ko-KR" sz="3400" b="1" dirty="0">
                 <a:solidFill>
                   <a:srgbClr val="1F2937"/>
                 </a:solidFill>
@@ -7248,7 +7248,7 @@
               <a:buNone/>
             </a:pPr>
             <a:r>
-              <a:rPr lang="ko-KR" altLang="en-US" sz="3400" b="1" dirty="0">
+              <a:rPr lang="en-US" altLang="ko-KR" sz="3400" b="1" dirty="0">
                 <a:solidFill>
                   <a:srgbClr val="1F2937"/>
                 </a:solidFill>
@@ -7295,7 +7295,7 @@
               <a:buNone/>
             </a:pPr>
             <a:r>
-              <a:rPr lang="ko-KR" altLang="en-US" sz="3400" b="1" dirty="0">
+              <a:rPr lang="en-US" altLang="ko-KR" sz="3400" b="1" dirty="0">
                 <a:solidFill>
                   <a:srgbClr val="1F2937"/>
                 </a:solidFill>
@@ -7525,7 +7525,7 @@
               <a:buNone/>
             </a:pPr>
             <a:r>
-              <a:rPr lang="ko-KR" altLang="en-US" sz="3400" b="1" dirty="0">
+              <a:rPr lang="en-US" altLang="ko-KR" sz="3400" b="1" dirty="0">
                 <a:solidFill>
                   <a:srgbClr val="1F2937"/>
                 </a:solidFill>
@@ -7589,7 +7589,7 @@
               <a:buNone/>
             </a:pPr>
             <a:r>
-              <a:rPr lang="ko-KR" altLang="en-US" sz="3400" b="1" dirty="0">
+              <a:rPr lang="en-US" altLang="ko-KR" sz="3400" b="1" dirty="0">
                 <a:solidFill>
                   <a:srgbClr val="1F2937"/>
                 </a:solidFill>
@@ -7836,7 +7836,7 @@
               <a:buNone/>
             </a:pPr>
             <a:r>
-              <a:rPr lang="ko-KR" altLang="en-US" sz="3400" b="1" dirty="0">
+              <a:rPr lang="en-US" altLang="ko-KR" sz="3400" b="1" dirty="0">
                 <a:solidFill>
                   <a:srgbClr val="1F2937"/>
                 </a:solidFill>
@@ -7900,7 +7900,7 @@
               <a:buNone/>
             </a:pPr>
             <a:r>
-              <a:rPr lang="ko-KR" altLang="en-US" sz="3400" b="1" dirty="0">
+              <a:rPr lang="en-US" altLang="ko-KR" sz="3400" b="1" dirty="0">
                 <a:solidFill>
                   <a:srgbClr val="1F2937"/>
                 </a:solidFill>
@@ -8165,7 +8165,7 @@
               <a:buNone/>
             </a:pPr>
             <a:r>
-              <a:rPr lang="ko-KR" altLang="en-US" sz="2800" dirty="0">
+              <a:rPr lang="en-US" altLang="ko-KR" sz="2800" dirty="0">
                 <a:solidFill>
                   <a:srgbClr val="1F2937"/>
                 </a:solidFill>
@@ -8188,7 +8188,7 @@
               <a:buNone/>
             </a:pPr>
             <a:r>
-              <a:rPr lang="ko-KR" altLang="en-US" sz="2800" dirty="0">
+              <a:rPr lang="en-US" altLang="ko-KR" sz="2800" dirty="0">
                 <a:solidFill>
                   <a:srgbClr val="1F2937"/>
                 </a:solidFill>
@@ -8211,7 +8211,7 @@
               <a:buNone/>
             </a:pPr>
             <a:r>
-              <a:rPr lang="ko-KR" altLang="en-US" sz="2800" dirty="0">
+              <a:rPr lang="en-US" altLang="ko-KR" sz="2800" dirty="0">
                 <a:solidFill>
                   <a:srgbClr val="1F2937"/>
                 </a:solidFill>
@@ -8257,7 +8257,7 @@
               <a:buNone/>
             </a:pPr>
             <a:r>
-              <a:rPr lang="ko-KR" altLang="en-US" sz="2800" dirty="0">
+              <a:rPr lang="en-US" altLang="ko-KR" sz="2800" dirty="0">
                 <a:solidFill>
                   <a:srgbClr val="1F2937"/>
                 </a:solidFill>
@@ -8280,7 +8280,7 @@
               <a:buNone/>
             </a:pPr>
             <a:r>
-              <a:rPr lang="ko-KR" altLang="en-US" sz="2800" dirty="0">
+              <a:rPr lang="en-US" altLang="ko-KR" sz="2800" dirty="0">
                 <a:solidFill>
                   <a:srgbClr val="1F2937"/>
                 </a:solidFill>

--- a/dist/초3/영어/듣기와말하기/초3_영어_듣기와말하기_01_인사하기_학생용.pptx
+++ b/dist/초3/영어/듣기와말하기/초3_영어_듣기와말하기_01_인사하기_학생용.pptx
@@ -120,13 +120,13 @@
   <p:extLst>
     <p:ext uri="{521415D9-36F7-43E2-AB2F-B90AF26B5E84}">
       <p14:sectionLst xmlns:p14="http://schemas.microsoft.com/office/powerpoint/2010/main">
-        <p14:section name="도입" id="{8e76a980-cdf7-130b-72d6-846cb631075f}">
+        <p14:section name="도입" id="{4f94e26c-38a6-ff0c-8855-de12b47d71bc}">
           <p14:sldIdLst>
             <p14:sldId id="256"/>
             <p14:sldId id="257"/>
           </p14:sldIdLst>
         </p14:section>
-        <p14:section name="개념" id="{d91a1b10-5975-de82-399e-3c949b9e71de}">
+        <p14:section name="개념" id="{facf25b7-043f-e954-036f-5e9b316b4dec}">
           <p14:sldIdLst>
             <p14:sldId id="258"/>
             <p14:sldId id="259"/>
@@ -134,7 +134,7 @@
             <p14:sldId id="263"/>
           </p14:sldIdLst>
         </p14:section>
-        <p14:section name="연습" id="{3e4b3321-0be6-50b6-74d0-9bc0daaea51e}">
+        <p14:section name="연습" id="{61e5d478-3568-935e-254e-2b244c9afd9f}">
           <p14:sldIdLst>
             <p14:sldId id="260"/>
             <p14:sldId id="261"/>
@@ -142,24 +142,24 @@
             <p14:sldId id="265"/>
           </p14:sldIdLst>
         </p14:section>
-        <p14:section name="개념" id="{0e8e5f43-28ed-f61b-9185-b895a472e200}">
+        <p14:section name="개념" id="{293c4a72-db10-7194-26e7-bd907225bc69}">
           <p14:sldIdLst/>
         </p14:section>
-        <p14:section name="연습" id="{325fd940-06d5-91aa-3797-23ced98bef20}">
+        <p14:section name="연습" id="{1ef7476f-c8eb-5e35-84d6-d11b77d2fc6a}">
           <p14:sldIdLst/>
         </p14:section>
-        <p14:section name="확인" id="{a7601b40-f289-871d-b07b-d8474c94b417}">
+        <p14:section name="확인" id="{6d09f210-058f-72f8-ac1e-4751c124551d}">
           <p14:sldIdLst>
             <p14:sldId id="266"/>
             <p14:sldId id="267"/>
           </p14:sldIdLst>
         </p14:section>
-        <p14:section name="정리" id="{3b865c84-aa9e-330d-d650-75a59a2fe9c0}">
+        <p14:section name="정리" id="{e512b12a-83a1-e33d-2baa-29472f9f0be8}">
           <p14:sldIdLst>
             <p14:sldId id="268"/>
           </p14:sldIdLst>
         </p14:section>
-        <p14:section name="보충" id="{c0dd9932-f04c-54c2-d792-32253811f6bb}">
+        <p14:section name="보충" id="{c9f94794-cb9b-6370-9ec0-edc564e0b696}">
           <p14:sldIdLst>
             <p14:sldId id="269"/>
           </p14:sldIdLst>
